--- a/index/clientes/mkof/MOVA-GitHub-Paso1-Crear-Cuenta.pptx
+++ b/index/clientes/mkof/MOVA-GitHub-Paso1-Crear-Cuenta.pptx
@@ -5931,7 +5931,7 @@
               </a:defRPr>
             </a:pPr>
             <a:r>
-              <a:t>Paso 2 · Próxima entrega</a:t>
+              <a:t>Paso 2 · Continuación disponible</a:t>
             </a:r>
           </a:p>
         </p:txBody>
@@ -6006,7 +6006,7 @@
               </a:defRPr>
             </a:pPr>
             <a:r>
-              <a:t>Cuando la cuenta esté lista, avisar al equipo para recibir la guía del Paso 2.</a:t>
+              <a:t>Guía: github-repo.html · PPT: MOVA-GitHub-Paso2-Repo-Privado.pptx</a:t>
             </a:r>
           </a:p>
         </p:txBody>
